--- a/markdown/files/slides/lecture14_graphs1.pptx
+++ b/markdown/files/slides/lecture14_graphs1.pptx
@@ -226,7 +226,7 @@
           <a:p>
             <a:fld id="{D249A25B-064F-4940-8CEE-34D7920B25F9}" type="datetimeFigureOut">
               <a:rPr lang="en-US" smtClean="0"/>
-              <a:t>2/6/2026</a:t>
+              <a:t>4/28/2026</a:t>
             </a:fld>
             <a:endParaRPr lang="en-US"/>
           </a:p>
@@ -640,7 +640,7 @@
           <a:p>
             <a:fld id="{28421D02-69CC-42C9-85CE-4F8B68ED22B8}" type="datetimeFigureOut">
               <a:rPr lang="en-US" smtClean="0"/>
-              <a:t>2/6/2026</a:t>
+              <a:t>4/28/2026</a:t>
             </a:fld>
             <a:endParaRPr lang="en-US"/>
           </a:p>
@@ -838,7 +838,7 @@
           <a:p>
             <a:fld id="{28421D02-69CC-42C9-85CE-4F8B68ED22B8}" type="datetimeFigureOut">
               <a:rPr lang="en-US" smtClean="0"/>
-              <a:t>2/6/2026</a:t>
+              <a:t>4/28/2026</a:t>
             </a:fld>
             <a:endParaRPr lang="en-US"/>
           </a:p>
@@ -1046,7 +1046,7 @@
           <a:p>
             <a:fld id="{28421D02-69CC-42C9-85CE-4F8B68ED22B8}" type="datetimeFigureOut">
               <a:rPr lang="en-US" smtClean="0"/>
-              <a:t>2/6/2026</a:t>
+              <a:t>4/28/2026</a:t>
             </a:fld>
             <a:endParaRPr lang="en-US"/>
           </a:p>
@@ -1244,7 +1244,7 @@
           <a:p>
             <a:fld id="{28421D02-69CC-42C9-85CE-4F8B68ED22B8}" type="datetimeFigureOut">
               <a:rPr lang="en-US" smtClean="0"/>
-              <a:t>2/6/2026</a:t>
+              <a:t>4/28/2026</a:t>
             </a:fld>
             <a:endParaRPr lang="en-US"/>
           </a:p>
@@ -1519,7 +1519,7 @@
           <a:p>
             <a:fld id="{28421D02-69CC-42C9-85CE-4F8B68ED22B8}" type="datetimeFigureOut">
               <a:rPr lang="en-US" smtClean="0"/>
-              <a:t>2/6/2026</a:t>
+              <a:t>4/28/2026</a:t>
             </a:fld>
             <a:endParaRPr lang="en-US"/>
           </a:p>
@@ -1784,7 +1784,7 @@
           <a:p>
             <a:fld id="{28421D02-69CC-42C9-85CE-4F8B68ED22B8}" type="datetimeFigureOut">
               <a:rPr lang="en-US" smtClean="0"/>
-              <a:t>2/6/2026</a:t>
+              <a:t>4/28/2026</a:t>
             </a:fld>
             <a:endParaRPr lang="en-US"/>
           </a:p>
@@ -2196,7 +2196,7 @@
           <a:p>
             <a:fld id="{28421D02-69CC-42C9-85CE-4F8B68ED22B8}" type="datetimeFigureOut">
               <a:rPr lang="en-US" smtClean="0"/>
-              <a:t>2/6/2026</a:t>
+              <a:t>4/28/2026</a:t>
             </a:fld>
             <a:endParaRPr lang="en-US"/>
           </a:p>
@@ -2337,7 +2337,7 @@
           <a:p>
             <a:fld id="{28421D02-69CC-42C9-85CE-4F8B68ED22B8}" type="datetimeFigureOut">
               <a:rPr lang="en-US" smtClean="0"/>
-              <a:t>2/6/2026</a:t>
+              <a:t>4/28/2026</a:t>
             </a:fld>
             <a:endParaRPr lang="en-US"/>
           </a:p>
@@ -2450,7 +2450,7 @@
           <a:p>
             <a:fld id="{28421D02-69CC-42C9-85CE-4F8B68ED22B8}" type="datetimeFigureOut">
               <a:rPr lang="en-US" smtClean="0"/>
-              <a:t>2/6/2026</a:t>
+              <a:t>4/28/2026</a:t>
             </a:fld>
             <a:endParaRPr lang="en-US"/>
           </a:p>
@@ -2761,7 +2761,7 @@
           <a:p>
             <a:fld id="{28421D02-69CC-42C9-85CE-4F8B68ED22B8}" type="datetimeFigureOut">
               <a:rPr lang="en-US" smtClean="0"/>
-              <a:t>2/6/2026</a:t>
+              <a:t>4/28/2026</a:t>
             </a:fld>
             <a:endParaRPr lang="en-US"/>
           </a:p>
@@ -3049,7 +3049,7 @@
           <a:p>
             <a:fld id="{28421D02-69CC-42C9-85CE-4F8B68ED22B8}" type="datetimeFigureOut">
               <a:rPr lang="en-US" smtClean="0"/>
-              <a:t>2/6/2026</a:t>
+              <a:t>4/28/2026</a:t>
             </a:fld>
             <a:endParaRPr lang="en-US"/>
           </a:p>
@@ -3290,7 +3290,7 @@
           <a:p>
             <a:fld id="{28421D02-69CC-42C9-85CE-4F8B68ED22B8}" type="datetimeFigureOut">
               <a:rPr lang="en-US" smtClean="0"/>
-              <a:t>2/6/2026</a:t>
+              <a:t>4/28/2026</a:t>
             </a:fld>
             <a:endParaRPr lang="en-US"/>
           </a:p>
@@ -3739,8 +3739,13 @@
             </a:br>
             <a:r>
               <a:rPr lang="en-US" dirty="0"/>
-              <a:t>Lecture 14: Graphs</a:t>
+              <a:t>Lecture 14</a:t>
             </a:r>
+            <a:r>
+              <a:rPr lang="en-US"/>
+              <a:t>: Sorting 3</a:t>
+            </a:r>
+            <a:endParaRPr lang="en-US" dirty="0"/>
           </a:p>
         </p:txBody>
       </p:sp>
